--- a/assets/pptx/catalog-113.pptx
+++ b/assets/pptx/catalog-113.pptx
@@ -3488,7 +3488,7 @@
                 <a:ea typeface="Ebrima"/>
                 <a:cs typeface="Ebrima"/>
               </a:rPr>
-              <a:t>ጌታዬ ስራህ እኮ ከአይምሮዬ በላይ ነው (2x)</a:t>
+              <a:t>ጌታዬ ስራህ እኮ ከአይምሮዬ በላይ ነው 2x</a:t>
             </a:r>
           </a:p>
         </p:txBody>
@@ -3756,7 +3756,7 @@
                 <a:ea typeface="Ebrima"/>
                 <a:cs typeface="Ebrima"/>
               </a:rPr>
-              <a:t>እኔ ምስክር ነኝ በዓይኔ አይቻለሁ (2x)</a:t>
+              <a:t>እኔ ምስክር ነኝ በዓይኔ አይቻለሁ 2x</a:t>
             </a:r>
           </a:p>
         </p:txBody>
@@ -4091,7 +4091,7 @@
                 <a:ea typeface="Ebrima"/>
                 <a:cs typeface="Ebrima"/>
               </a:rPr>
-              <a:t>ጌታዬ ስራህ እኮ ከአይምሮዬ በላይ ነው (2x)</a:t>
+              <a:t>ጌታዬ ስራህ እኮ ከአይምሮዬ በላይ ነው 2x</a:t>
             </a:r>
           </a:p>
         </p:txBody>
@@ -4359,7 +4359,7 @@
                 <a:ea typeface="Ebrima"/>
                 <a:cs typeface="Ebrima"/>
               </a:rPr>
-              <a:t>በእውነተኛ ፍቅርህ እኛን አድነሃል (2x)</a:t>
+              <a:t>በእውነተኛ ፍቅርህ እኛን አድነሃል 2x</a:t>
             </a:r>
           </a:p>
         </p:txBody>
@@ -4493,7 +4493,7 @@
                 <a:ea typeface="Ebrima"/>
                 <a:cs typeface="Ebrima"/>
               </a:rPr>
-              <a:t>እኛን መውደድህ (4x)</a:t>
+              <a:t>እኛን መውደድህ 4x</a:t>
             </a:r>
           </a:p>
         </p:txBody>
@@ -5163,7 +5163,7 @@
                 <a:ea typeface="Ebrima"/>
                 <a:cs typeface="Ebrima"/>
               </a:rPr>
-              <a:t>ብዙ ብዙ ምክንያት አለኝ ክበር (3x)</a:t>
+              <a:t>ብዙ ብዙ ምክንያት አለኝ ክበር 3x</a:t>
             </a:r>
           </a:p>
         </p:txBody>
@@ -5565,7 +5565,7 @@
                 <a:ea typeface="Ebrima"/>
                 <a:cs typeface="Ebrima"/>
               </a:rPr>
-              <a:t>ያረክልን ብዙ ነው ጌታ (2x)</a:t>
+              <a:t>ያረክልን ብዙ ነው ጌታ 2x</a:t>
             </a:r>
           </a:p>
         </p:txBody>
@@ -5632,7 +5632,7 @@
                 <a:ea typeface="Ebrima"/>
                 <a:cs typeface="Ebrima"/>
               </a:rPr>
-              <a:t>ያረክልን ብዙ ነው አሃሃሃ (2x)</a:t>
+              <a:t>ያረክልን ብዙ ነው አሃሃሃ 2x</a:t>
             </a:r>
           </a:p>
         </p:txBody>
@@ -5967,7 +5967,7 @@
                 <a:ea typeface="Ebrima"/>
                 <a:cs typeface="Ebrima"/>
               </a:rPr>
-              <a:t>ያረክልን ብዙ ነው ጌታ (2x)</a:t>
+              <a:t>ያረክልን ብዙ ነው ጌታ 2x</a:t>
             </a:r>
           </a:p>
         </p:txBody>
@@ -6034,7 +6034,7 @@
                 <a:ea typeface="Ebrima"/>
                 <a:cs typeface="Ebrima"/>
               </a:rPr>
-              <a:t>ያረክልን ብዙ ነው አሃሃሃ (2x)</a:t>
+              <a:t>ያረክልን ብዙ ነው አሃሃሃ 2x</a:t>
             </a:r>
           </a:p>
         </p:txBody>
@@ -6101,7 +6101,7 @@
                 <a:ea typeface="Ebrima"/>
                 <a:cs typeface="Ebrima"/>
               </a:rPr>
-              <a:t>ጌታዬ ስራህ እኮ ከአይምሮዬ በላይ ነው (2x)</a:t>
+              <a:t>ጌታዬ ስራህ እኮ ከአይምሮዬ በላይ ነው 2x</a:t>
             </a:r>
           </a:p>
         </p:txBody>
@@ -6369,7 +6369,7 @@
                 <a:ea typeface="Ebrima"/>
                 <a:cs typeface="Ebrima"/>
               </a:rPr>
-              <a:t>ጽድቅነትና ሰውን መውደድህ ነው (2x)</a:t>
+              <a:t>ጽድቅነትና ሰውን መውደድህ ነው 2x</a:t>
             </a:r>
           </a:p>
         </p:txBody>
